--- a/Lectures/01.Foundations/tutorial_installation.pptx
+++ b/Lectures/01.Foundations/tutorial_installation.pptx
@@ -4613,13 +4613,20 @@
             </a:br>
             <a:r>
               <a:rPr lang="en-US" dirty="0">
+                <a:latin typeface="+mn-lt"/>
+                <a:cs typeface="Courier New" panose="02070309020205020404" pitchFamily="49" charset="0"/>
+              </a:rPr>
+              <a:t>	</a:t>
+            </a:r>
+            <a:r>
+              <a:rPr lang="en-US" dirty="0">
                 <a:solidFill>
                   <a:srgbClr val="0033CC"/>
                 </a:solidFill>
                 <a:latin typeface="Courier New" panose="02070309020205020404" pitchFamily="49" charset="0"/>
                 <a:cs typeface="Courier New" panose="02070309020205020404" pitchFamily="49" charset="0"/>
               </a:rPr>
-              <a:t>source </a:t>
+              <a:t>cd </a:t>
             </a:r>
             <a:r>
               <a:rPr lang="en-US" dirty="0" err="1">
@@ -4630,50 +4637,31 @@
                 <a:cs typeface="Courier New" panose="02070309020205020404" pitchFamily="49" charset="0"/>
               </a:rPr>
               <a:t>mlinphysics</a:t>
-            </a:r>
-            <a:r>
-              <a:rPr lang="en-US" dirty="0">
-                <a:solidFill>
-                  <a:srgbClr val="0033CC"/>
-                </a:solidFill>
-                <a:latin typeface="Courier New" panose="02070309020205020404" pitchFamily="49" charset="0"/>
-                <a:cs typeface="Courier New" panose="02070309020205020404" pitchFamily="49" charset="0"/>
-              </a:rPr>
-              <a:t>/</a:t>
-            </a:r>
-            <a:r>
-              <a:rPr lang="en-US" dirty="0" err="1">
-                <a:solidFill>
-                  <a:srgbClr val="0033CC"/>
-                </a:solidFill>
-                <a:latin typeface="Courier New" panose="02070309020205020404" pitchFamily="49" charset="0"/>
-                <a:cs typeface="Courier New" panose="02070309020205020404" pitchFamily="49" charset="0"/>
-              </a:rPr>
-              <a:t>setup.sh</a:t>
-            </a:r>
-            <a:r>
-              <a:rPr lang="en-US" dirty="0">
-                <a:solidFill>
-                  <a:srgbClr val="0033CC"/>
-                </a:solidFill>
-                <a:latin typeface="Courier New" panose="02070309020205020404" pitchFamily="49" charset="0"/>
-                <a:cs typeface="Courier New" panose="02070309020205020404" pitchFamily="49" charset="0"/>
-              </a:rPr>
-              <a:t> </a:t>
-            </a:r>
-            <a:r>
-              <a:rPr lang="en-US" dirty="0">
-                <a:latin typeface="+mn-lt"/>
-                <a:cs typeface="Courier New" panose="02070309020205020404" pitchFamily="49" charset="0"/>
-              </a:rPr>
-              <a:t>(for PYTHONPATH)</a:t>
             </a:r>
             <a:br>
               <a:rPr lang="en-US" dirty="0">
-                <a:latin typeface="+mn-lt"/>
+                <a:solidFill>
+                  <a:srgbClr val="0033CC"/>
+                </a:solidFill>
+                <a:latin typeface="Courier New" panose="02070309020205020404" pitchFamily="49" charset="0"/>
                 <a:cs typeface="Courier New" panose="02070309020205020404" pitchFamily="49" charset="0"/>
               </a:rPr>
             </a:br>
+            <a:r>
+              <a:rPr lang="en-US" dirty="0">
+                <a:solidFill>
+                  <a:srgbClr val="0033CC"/>
+                </a:solidFill>
+                <a:latin typeface="Courier New" panose="02070309020205020404" pitchFamily="49" charset="0"/>
+                <a:cs typeface="Courier New" panose="02070309020205020404" pitchFamily="49" charset="0"/>
+              </a:rPr>
+              <a:t>	pip install –e .</a:t>
+            </a:r>
+          </a:p>
+          <a:p>
+            <a:pPr marL="0" indent="0">
+              <a:buNone/>
+            </a:pPr>
             <a:endParaRPr lang="en-US" dirty="0">
               <a:latin typeface="+mn-lt"/>
               <a:cs typeface="Courier New" panose="02070309020205020404" pitchFamily="49" charset="0"/>
@@ -4682,7 +4670,7 @@
           <a:p>
             <a:pPr marL="457200" indent="-457200">
               <a:buFont typeface="+mj-lt"/>
-              <a:buAutoNum type="arabicPeriod" startAt="7"/>
+              <a:buAutoNum type="arabicPeriod" startAt="9"/>
             </a:pPr>
             <a:r>
               <a:rPr lang="en-US" dirty="0">
@@ -4768,52 +4756,12 @@
               <a:rPr lang="en-US" dirty="0">
                 <a:cs typeface="Courier New" panose="02070309020205020404" pitchFamily="49" charset="0"/>
               </a:rPr>
-              <a:t>which should appear in your default browser. In </a:t>
-            </a:r>
-            <a:r>
-              <a:rPr lang="en-US" dirty="0" err="1">
-                <a:cs typeface="Courier New" panose="02070309020205020404" pitchFamily="49" charset="0"/>
-              </a:rPr>
-              <a:t>jupyterlab</a:t>
-            </a:r>
-            <a:r>
-              <a:rPr lang="en-US" dirty="0">
-                <a:cs typeface="Courier New" panose="02070309020205020404" pitchFamily="49" charset="0"/>
-              </a:rPr>
-              <a:t>, </a:t>
-            </a:r>
-            <a:r>
-              <a:rPr lang="en-US" dirty="0">
-                <a:latin typeface="+mn-lt"/>
-                <a:cs typeface="Courier New" panose="02070309020205020404" pitchFamily="49" charset="0"/>
-              </a:rPr>
-              <a:t>you should see the folder </a:t>
-            </a:r>
-            <a:r>
-              <a:rPr lang="en-US" b="1" dirty="0" err="1">
-                <a:solidFill>
-                  <a:srgbClr val="0033CC"/>
-                </a:solidFill>
-                <a:cs typeface="Courier New" panose="02070309020205020404" pitchFamily="49" charset="0"/>
-              </a:rPr>
-              <a:t>mlinphysics</a:t>
-            </a:r>
-            <a:r>
-              <a:rPr lang="en-US" b="1" dirty="0">
-                <a:solidFill>
-                  <a:srgbClr val="0033CC"/>
-                </a:solidFill>
-                <a:cs typeface="Courier New" panose="02070309020205020404" pitchFamily="49" charset="0"/>
-              </a:rPr>
-              <a:t> </a:t>
-            </a:r>
-            <a:r>
-              <a:rPr lang="en-US" dirty="0">
-                <a:latin typeface="+mn-lt"/>
-                <a:cs typeface="Courier New" panose="02070309020205020404" pitchFamily="49" charset="0"/>
-              </a:rPr>
-              <a:t>listed as a folder icon. </a:t>
-            </a:r>
+              <a:t>which should appear in your default browser. </a:t>
+            </a:r>
+            <a:endParaRPr lang="en-US" dirty="0">
+              <a:latin typeface="+mn-lt"/>
+              <a:cs typeface="Courier New" panose="02070309020205020404" pitchFamily="49" charset="0"/>
+            </a:endParaRPr>
           </a:p>
           <a:p>
             <a:pPr marL="0" indent="0">
@@ -5087,7 +5035,24 @@
                 <a:latin typeface="+mn-lt"/>
                 <a:cs typeface="Courier New" panose="02070309020205020404" pitchFamily="49" charset="0"/>
               </a:rPr>
-              <a:t>is being restructured and improved, so code etc. could change without notice!</a:t>
+              <a:t>may be improved, so code etc. could change and require a periodic </a:t>
+            </a:r>
+            <a:r>
+              <a:rPr lang="en-US" dirty="0">
+                <a:solidFill>
+                  <a:srgbClr val="0033CC"/>
+                </a:solidFill>
+                <a:latin typeface="Courier New" panose="02070309020205020404" pitchFamily="49" charset="0"/>
+                <a:cs typeface="Courier New" panose="02070309020205020404" pitchFamily="49" charset="0"/>
+              </a:rPr>
+              <a:t>git pull</a:t>
+            </a:r>
+            <a:r>
+              <a:rPr lang="en-US" dirty="0">
+                <a:latin typeface="+mn-lt"/>
+                <a:cs typeface="Courier New" panose="02070309020205020404" pitchFamily="49" charset="0"/>
+              </a:rPr>
+              <a:t> to update it.</a:t>
             </a:r>
           </a:p>
           <a:p>
